--- a/excel/pics_11_data_visualization/fig11.pptx
+++ b/excel/pics_11_data_visualization/fig11.pptx
@@ -104,6 +104,11 @@
       </a:defRPr>
     </a:lvl9pPr>
   </p:defaultTextStyle>
+  <p:extLst>
+    <p:ext uri="{EFAFB233-063F-42B5-8137-9DF3F51BA10A}">
+      <p15:sldGuideLst xmlns:p15="http://schemas.microsoft.com/office/powerpoint/2012/main"/>
+    </p:ext>
+  </p:extLst>
 </p:presentation>
 </file>
 
@@ -111,19 +116,27 @@
 <pc:chgInfo xmlns:a="http://schemas.openxmlformats.org/drawingml/2006/main" xmlns:r="http://schemas.openxmlformats.org/officeDocument/2006/relationships" xmlns:ac="http://schemas.microsoft.com/office/drawing/2013/main/command" xmlns:pc="http://schemas.microsoft.com/office/powerpoint/2013/main/command">
   <pc:docChgLst>
     <pc:chgData name="Hageman J, Jurre" userId="0acd7849-4b12-4d61-a6a5-89c12690410a" providerId="ADAL" clId="{92700B7B-70C0-4221-9129-619E95E8CBFC}"/>
-    <pc:docChg chg="modSld">
-      <pc:chgData name="Hageman J, Jurre" userId="0acd7849-4b12-4d61-a6a5-89c12690410a" providerId="ADAL" clId="{92700B7B-70C0-4221-9129-619E95E8CBFC}" dt="2026-09-01T13:12:32.160" v="0" actId="14100"/>
+    <pc:docChg chg="custSel modSld">
+      <pc:chgData name="Hageman J, Jurre" userId="0acd7849-4b12-4d61-a6a5-89c12690410a" providerId="ADAL" clId="{92700B7B-70C0-4221-9129-619E95E8CBFC}" dt="2026-09-02T07:59:12.118" v="6" actId="14100"/>
       <pc:docMkLst>
         <pc:docMk/>
       </pc:docMkLst>
-      <pc:sldChg chg="modSp mod">
-        <pc:chgData name="Hageman J, Jurre" userId="0acd7849-4b12-4d61-a6a5-89c12690410a" providerId="ADAL" clId="{92700B7B-70C0-4221-9129-619E95E8CBFC}" dt="2026-09-01T13:12:32.160" v="0" actId="14100"/>
+      <pc:sldChg chg="addSp delSp modSp mod">
+        <pc:chgData name="Hageman J, Jurre" userId="0acd7849-4b12-4d61-a6a5-89c12690410a" providerId="ADAL" clId="{92700B7B-70C0-4221-9129-619E95E8CBFC}" dt="2026-09-02T07:59:12.118" v="6" actId="14100"/>
         <pc:sldMkLst>
           <pc:docMk/>
           <pc:sldMk cId="563189967" sldId="256"/>
         </pc:sldMkLst>
-        <pc:picChg chg="mod">
-          <ac:chgData name="Hageman J, Jurre" userId="0acd7849-4b12-4d61-a6a5-89c12690410a" providerId="ADAL" clId="{92700B7B-70C0-4221-9129-619E95E8CBFC}" dt="2026-09-01T13:12:32.160" v="0" actId="14100"/>
+        <pc:picChg chg="add mod">
+          <ac:chgData name="Hageman J, Jurre" userId="0acd7849-4b12-4d61-a6a5-89c12690410a" providerId="ADAL" clId="{92700B7B-70C0-4221-9129-619E95E8CBFC}" dt="2026-09-02T07:59:12.118" v="6" actId="14100"/>
+          <ac:picMkLst>
+            <pc:docMk/>
+            <pc:sldMk cId="563189967" sldId="256"/>
+            <ac:picMk id="3" creationId="{7B5CAD01-BD08-5B67-DBAC-29CE65CCF036}"/>
+          </ac:picMkLst>
+        </pc:picChg>
+        <pc:picChg chg="del mod">
+          <ac:chgData name="Hageman J, Jurre" userId="0acd7849-4b12-4d61-a6a5-89c12690410a" providerId="ADAL" clId="{92700B7B-70C0-4221-9129-619E95E8CBFC}" dt="2026-09-02T07:59:00.902" v="3" actId="478"/>
           <ac:picMkLst>
             <pc:docMk/>
             <pc:sldMk cId="563189967" sldId="256"/>
@@ -285,7 +298,7 @@
           <a:p>
             <a:fld id="{0CEB3B3B-5EC2-494B-AE6B-D597A9F3598B}" type="datetimeFigureOut">
               <a:rPr lang="en-NL" smtClean="0"/>
-              <a:t>01/09/2026</a:t>
+              <a:t>02/09/2026</a:t>
             </a:fld>
             <a:endParaRPr lang="en-NL"/>
           </a:p>
@@ -485,7 +498,7 @@
           <a:p>
             <a:fld id="{0CEB3B3B-5EC2-494B-AE6B-D597A9F3598B}" type="datetimeFigureOut">
               <a:rPr lang="en-NL" smtClean="0"/>
-              <a:t>01/09/2026</a:t>
+              <a:t>02/09/2026</a:t>
             </a:fld>
             <a:endParaRPr lang="en-NL"/>
           </a:p>
@@ -695,7 +708,7 @@
           <a:p>
             <a:fld id="{0CEB3B3B-5EC2-494B-AE6B-D597A9F3598B}" type="datetimeFigureOut">
               <a:rPr lang="en-NL" smtClean="0"/>
-              <a:t>01/09/2026</a:t>
+              <a:t>02/09/2026</a:t>
             </a:fld>
             <a:endParaRPr lang="en-NL"/>
           </a:p>
@@ -895,7 +908,7 @@
           <a:p>
             <a:fld id="{0CEB3B3B-5EC2-494B-AE6B-D597A9F3598B}" type="datetimeFigureOut">
               <a:rPr lang="en-NL" smtClean="0"/>
-              <a:t>01/09/2026</a:t>
+              <a:t>02/09/2026</a:t>
             </a:fld>
             <a:endParaRPr lang="en-NL"/>
           </a:p>
@@ -1171,7 +1184,7 @@
           <a:p>
             <a:fld id="{0CEB3B3B-5EC2-494B-AE6B-D597A9F3598B}" type="datetimeFigureOut">
               <a:rPr lang="en-NL" smtClean="0"/>
-              <a:t>01/09/2026</a:t>
+              <a:t>02/09/2026</a:t>
             </a:fld>
             <a:endParaRPr lang="en-NL"/>
           </a:p>
@@ -1439,7 +1452,7 @@
           <a:p>
             <a:fld id="{0CEB3B3B-5EC2-494B-AE6B-D597A9F3598B}" type="datetimeFigureOut">
               <a:rPr lang="en-NL" smtClean="0"/>
-              <a:t>01/09/2026</a:t>
+              <a:t>02/09/2026</a:t>
             </a:fld>
             <a:endParaRPr lang="en-NL"/>
           </a:p>
@@ -1854,7 +1867,7 @@
           <a:p>
             <a:fld id="{0CEB3B3B-5EC2-494B-AE6B-D597A9F3598B}" type="datetimeFigureOut">
               <a:rPr lang="en-NL" smtClean="0"/>
-              <a:t>01/09/2026</a:t>
+              <a:t>02/09/2026</a:t>
             </a:fld>
             <a:endParaRPr lang="en-NL"/>
           </a:p>
@@ -1996,7 +2009,7 @@
           <a:p>
             <a:fld id="{0CEB3B3B-5EC2-494B-AE6B-D597A9F3598B}" type="datetimeFigureOut">
               <a:rPr lang="en-NL" smtClean="0"/>
-              <a:t>01/09/2026</a:t>
+              <a:t>02/09/2026</a:t>
             </a:fld>
             <a:endParaRPr lang="en-NL"/>
           </a:p>
@@ -2109,7 +2122,7 @@
           <a:p>
             <a:fld id="{0CEB3B3B-5EC2-494B-AE6B-D597A9F3598B}" type="datetimeFigureOut">
               <a:rPr lang="en-NL" smtClean="0"/>
-              <a:t>01/09/2026</a:t>
+              <a:t>02/09/2026</a:t>
             </a:fld>
             <a:endParaRPr lang="en-NL"/>
           </a:p>
@@ -2422,7 +2435,7 @@
           <a:p>
             <a:fld id="{0CEB3B3B-5EC2-494B-AE6B-D597A9F3598B}" type="datetimeFigureOut">
               <a:rPr lang="en-NL" smtClean="0"/>
-              <a:t>01/09/2026</a:t>
+              <a:t>02/09/2026</a:t>
             </a:fld>
             <a:endParaRPr lang="en-NL"/>
           </a:p>
@@ -2711,7 +2724,7 @@
           <a:p>
             <a:fld id="{0CEB3B3B-5EC2-494B-AE6B-D597A9F3598B}" type="datetimeFigureOut">
               <a:rPr lang="en-NL" smtClean="0"/>
-              <a:t>01/09/2026</a:t>
+              <a:t>02/09/2026</a:t>
             </a:fld>
             <a:endParaRPr lang="en-NL"/>
           </a:p>
@@ -2954,7 +2967,7 @@
           <a:p>
             <a:fld id="{0CEB3B3B-5EC2-494B-AE6B-D597A9F3598B}" type="datetimeFigureOut">
               <a:rPr lang="en-NL" smtClean="0"/>
-              <a:t>01/09/2026</a:t>
+              <a:t>02/09/2026</a:t>
             </a:fld>
             <a:endParaRPr lang="en-NL"/>
           </a:p>
@@ -3407,42 +3420,6 @@
           </a:prstGeom>
         </p:spPr>
       </p:pic>
-      <p:pic>
-        <p:nvPicPr>
-          <p:cNvPr id="7" name="Picture 6">
-            <a:extLst>
-              <a:ext uri="{FF2B5EF4-FFF2-40B4-BE49-F238E27FC236}">
-                <a16:creationId xmlns:a16="http://schemas.microsoft.com/office/drawing/2014/main" id="{7418D0AB-768D-3C73-155B-9941528E1C5C}"/>
-              </a:ext>
-            </a:extLst>
-          </p:cNvPr>
-          <p:cNvPicPr>
-            <a:picLocks noChangeAspect="1"/>
-          </p:cNvPicPr>
-          <p:nvPr/>
-        </p:nvPicPr>
-        <p:blipFill>
-          <a:blip r:embed="rId3">
-            <a:extLst>
-              <a:ext uri="{28A0092B-C50C-407E-A947-70E740481C1C}">
-                <a14:useLocalDpi xmlns:a14="http://schemas.microsoft.com/office/drawing/2010/main" val="0"/>
-              </a:ext>
-            </a:extLst>
-          </a:blip>
-          <a:stretch>
-            <a:fillRect/>
-          </a:stretch>
-        </p:blipFill>
-        <p:spPr>
-          <a:xfrm>
-            <a:off x="2943668" y="3569709"/>
-            <a:ext cx="5738608" cy="2951441"/>
-          </a:xfrm>
-          <a:prstGeom prst="rect">
-            <a:avLst/>
-          </a:prstGeom>
-        </p:spPr>
-      </p:pic>
       <p:sp>
         <p:nvSpPr>
           <p:cNvPr id="8" name="TextBox 7">
@@ -3515,6 +3492,42 @@
           </a:p>
         </p:txBody>
       </p:sp>
+      <p:pic>
+        <p:nvPicPr>
+          <p:cNvPr id="3" name="Picture 2">
+            <a:extLst>
+              <a:ext uri="{FF2B5EF4-FFF2-40B4-BE49-F238E27FC236}">
+                <a16:creationId xmlns:a16="http://schemas.microsoft.com/office/drawing/2014/main" id="{7B5CAD01-BD08-5B67-DBAC-29CE65CCF036}"/>
+              </a:ext>
+            </a:extLst>
+          </p:cNvPr>
+          <p:cNvPicPr>
+            <a:picLocks noChangeAspect="1"/>
+          </p:cNvPicPr>
+          <p:nvPr/>
+        </p:nvPicPr>
+        <p:blipFill>
+          <a:blip r:embed="rId3">
+            <a:extLst>
+              <a:ext uri="{28A0092B-C50C-407E-A947-70E740481C1C}">
+                <a14:useLocalDpi xmlns:a14="http://schemas.microsoft.com/office/drawing/2010/main" val="0"/>
+              </a:ext>
+            </a:extLst>
+          </a:blip>
+          <a:stretch>
+            <a:fillRect/>
+          </a:stretch>
+        </p:blipFill>
+        <p:spPr>
+          <a:xfrm>
+            <a:off x="2943668" y="3569709"/>
+            <a:ext cx="5738608" cy="2767772"/>
+          </a:xfrm>
+          <a:prstGeom prst="rect">
+            <a:avLst/>
+          </a:prstGeom>
+        </p:spPr>
+      </p:pic>
     </p:spTree>
     <p:extLst>
       <p:ext uri="{BB962C8B-B14F-4D97-AF65-F5344CB8AC3E}">
